--- a/榮耀都歸你.pptx
+++ b/榮耀都歸你.pptx
@@ -108,6 +108,11 @@
       </a:defRPr>
     </a:lvl9pPr>
   </p:defaultTextStyle>
+  <p:extLst>
+    <p:ext uri="{EFAFB233-063F-42B5-8137-9DF3F51BA10A}">
+      <p15:sldGuideLst xmlns:p15="http://schemas.microsoft.com/office/powerpoint/2012/main"/>
+    </p:ext>
+  </p:extLst>
 </p:presentation>
 </file>
 
@@ -149,7 +154,7 @@
           <a:lstStyle/>
           <a:p>
             <a:r>
-              <a:rPr lang="en-US" altLang="zh-TW" smtClean="0"/>
+              <a:rPr lang="en-US" altLang="zh-TW"/>
               <a:t>Click to edit Master title style</a:t>
             </a:r>
             <a:endParaRPr lang="zh-TW" altLang="en-US"/>
@@ -268,7 +273,7 @@
           </a:lstStyle>
           <a:p>
             <a:r>
-              <a:rPr lang="en-US" altLang="zh-TW" smtClean="0"/>
+              <a:rPr lang="en-US" altLang="zh-TW"/>
               <a:t>Click to edit Master subtitle style</a:t>
             </a:r>
             <a:endParaRPr lang="zh-TW" altLang="en-US"/>
@@ -292,7 +297,7 @@
           <a:p>
             <a:fld id="{E767E6BA-C17D-4DE3-A8A4-9877A2D746E7}" type="datetimeFigureOut">
               <a:rPr lang="vi-VN" smtClean="0"/>
-              <a:t>06/03/2021</a:t>
+              <a:t>28/09/2024</a:t>
             </a:fld>
             <a:endParaRPr lang="vi-VN"/>
           </a:p>
@@ -386,7 +391,7 @@
           <a:lstStyle/>
           <a:p>
             <a:r>
-              <a:rPr lang="en-US" altLang="zh-TW" smtClean="0"/>
+              <a:rPr lang="en-US" altLang="zh-TW"/>
               <a:t>Click to edit Master title style</a:t>
             </a:r>
             <a:endParaRPr lang="zh-TW" altLang="en-US"/>
@@ -410,35 +415,35 @@
           <a:p>
             <a:pPr lvl="0"/>
             <a:r>
-              <a:rPr lang="en-US" altLang="zh-TW" smtClean="0"/>
+              <a:rPr lang="en-US" altLang="zh-TW"/>
               <a:t>Edit Master text styles</a:t>
             </a:r>
           </a:p>
           <a:p>
             <a:pPr lvl="1"/>
             <a:r>
-              <a:rPr lang="en-US" altLang="zh-TW" smtClean="0"/>
+              <a:rPr lang="en-US" altLang="zh-TW"/>
               <a:t>Second level</a:t>
             </a:r>
           </a:p>
           <a:p>
             <a:pPr lvl="2"/>
             <a:r>
-              <a:rPr lang="en-US" altLang="zh-TW" smtClean="0"/>
+              <a:rPr lang="en-US" altLang="zh-TW"/>
               <a:t>Third level</a:t>
             </a:r>
           </a:p>
           <a:p>
             <a:pPr lvl="3"/>
             <a:r>
-              <a:rPr lang="en-US" altLang="zh-TW" smtClean="0"/>
+              <a:rPr lang="en-US" altLang="zh-TW"/>
               <a:t>Fourth level</a:t>
             </a:r>
           </a:p>
           <a:p>
             <a:pPr lvl="4"/>
             <a:r>
-              <a:rPr lang="en-US" altLang="zh-TW" smtClean="0"/>
+              <a:rPr lang="en-US" altLang="zh-TW"/>
               <a:t>Fifth level</a:t>
             </a:r>
             <a:endParaRPr lang="zh-TW" altLang="en-US"/>
@@ -462,7 +467,7 @@
           <a:p>
             <a:fld id="{E767E6BA-C17D-4DE3-A8A4-9877A2D746E7}" type="datetimeFigureOut">
               <a:rPr lang="vi-VN" smtClean="0"/>
-              <a:t>06/03/2021</a:t>
+              <a:t>28/09/2024</a:t>
             </a:fld>
             <a:endParaRPr lang="vi-VN"/>
           </a:p>
@@ -561,7 +566,7 @@
           <a:lstStyle/>
           <a:p>
             <a:r>
-              <a:rPr lang="en-US" altLang="zh-TW" smtClean="0"/>
+              <a:rPr lang="en-US" altLang="zh-TW"/>
               <a:t>Click to edit Master title style</a:t>
             </a:r>
             <a:endParaRPr lang="zh-TW" altLang="en-US"/>
@@ -590,35 +595,35 @@
           <a:p>
             <a:pPr lvl="0"/>
             <a:r>
-              <a:rPr lang="en-US" altLang="zh-TW" smtClean="0"/>
+              <a:rPr lang="en-US" altLang="zh-TW"/>
               <a:t>Edit Master text styles</a:t>
             </a:r>
           </a:p>
           <a:p>
             <a:pPr lvl="1"/>
             <a:r>
-              <a:rPr lang="en-US" altLang="zh-TW" smtClean="0"/>
+              <a:rPr lang="en-US" altLang="zh-TW"/>
               <a:t>Second level</a:t>
             </a:r>
           </a:p>
           <a:p>
             <a:pPr lvl="2"/>
             <a:r>
-              <a:rPr lang="en-US" altLang="zh-TW" smtClean="0"/>
+              <a:rPr lang="en-US" altLang="zh-TW"/>
               <a:t>Third level</a:t>
             </a:r>
           </a:p>
           <a:p>
             <a:pPr lvl="3"/>
             <a:r>
-              <a:rPr lang="en-US" altLang="zh-TW" smtClean="0"/>
+              <a:rPr lang="en-US" altLang="zh-TW"/>
               <a:t>Fourth level</a:t>
             </a:r>
           </a:p>
           <a:p>
             <a:pPr lvl="4"/>
             <a:r>
-              <a:rPr lang="en-US" altLang="zh-TW" smtClean="0"/>
+              <a:rPr lang="en-US" altLang="zh-TW"/>
               <a:t>Fifth level</a:t>
             </a:r>
             <a:endParaRPr lang="zh-TW" altLang="en-US"/>
@@ -642,7 +647,7 @@
           <a:p>
             <a:fld id="{E767E6BA-C17D-4DE3-A8A4-9877A2D746E7}" type="datetimeFigureOut">
               <a:rPr lang="vi-VN" smtClean="0"/>
-              <a:t>06/03/2021</a:t>
+              <a:t>28/09/2024</a:t>
             </a:fld>
             <a:endParaRPr lang="vi-VN"/>
           </a:p>
@@ -736,7 +741,7 @@
           <a:lstStyle/>
           <a:p>
             <a:r>
-              <a:rPr lang="en-US" altLang="zh-TW" smtClean="0"/>
+              <a:rPr lang="en-US" altLang="zh-TW"/>
               <a:t>Click to edit Master title style</a:t>
             </a:r>
             <a:endParaRPr lang="zh-TW" altLang="en-US"/>
@@ -760,35 +765,35 @@
           <a:p>
             <a:pPr lvl="0"/>
             <a:r>
-              <a:rPr lang="en-US" altLang="zh-TW" smtClean="0"/>
+              <a:rPr lang="en-US" altLang="zh-TW"/>
               <a:t>Edit Master text styles</a:t>
             </a:r>
           </a:p>
           <a:p>
             <a:pPr lvl="1"/>
             <a:r>
-              <a:rPr lang="en-US" altLang="zh-TW" smtClean="0"/>
+              <a:rPr lang="en-US" altLang="zh-TW"/>
               <a:t>Second level</a:t>
             </a:r>
           </a:p>
           <a:p>
             <a:pPr lvl="2"/>
             <a:r>
-              <a:rPr lang="en-US" altLang="zh-TW" smtClean="0"/>
+              <a:rPr lang="en-US" altLang="zh-TW"/>
               <a:t>Third level</a:t>
             </a:r>
           </a:p>
           <a:p>
             <a:pPr lvl="3"/>
             <a:r>
-              <a:rPr lang="en-US" altLang="zh-TW" smtClean="0"/>
+              <a:rPr lang="en-US" altLang="zh-TW"/>
               <a:t>Fourth level</a:t>
             </a:r>
           </a:p>
           <a:p>
             <a:pPr lvl="4"/>
             <a:r>
-              <a:rPr lang="en-US" altLang="zh-TW" smtClean="0"/>
+              <a:rPr lang="en-US" altLang="zh-TW"/>
               <a:t>Fifth level</a:t>
             </a:r>
             <a:endParaRPr lang="zh-TW" altLang="en-US"/>
@@ -812,7 +817,7 @@
           <a:p>
             <a:fld id="{E767E6BA-C17D-4DE3-A8A4-9877A2D746E7}" type="datetimeFigureOut">
               <a:rPr lang="vi-VN" smtClean="0"/>
-              <a:t>06/03/2021</a:t>
+              <a:t>28/09/2024</a:t>
             </a:fld>
             <a:endParaRPr lang="vi-VN"/>
           </a:p>
@@ -915,7 +920,7 @@
           </a:lstStyle>
           <a:p>
             <a:r>
-              <a:rPr lang="en-US" altLang="zh-TW" smtClean="0"/>
+              <a:rPr lang="en-US" altLang="zh-TW"/>
               <a:t>Click to edit Master title style</a:t>
             </a:r>
             <a:endParaRPr lang="zh-TW" altLang="en-US"/>
@@ -1035,7 +1040,7 @@
           <a:p>
             <a:pPr lvl="0"/>
             <a:r>
-              <a:rPr lang="en-US" altLang="zh-TW" smtClean="0"/>
+              <a:rPr lang="en-US" altLang="zh-TW"/>
               <a:t>Edit Master text styles</a:t>
             </a:r>
           </a:p>
@@ -1058,7 +1063,7 @@
           <a:p>
             <a:fld id="{E767E6BA-C17D-4DE3-A8A4-9877A2D746E7}" type="datetimeFigureOut">
               <a:rPr lang="vi-VN" smtClean="0"/>
-              <a:t>06/03/2021</a:t>
+              <a:t>28/09/2024</a:t>
             </a:fld>
             <a:endParaRPr lang="vi-VN"/>
           </a:p>
@@ -1152,7 +1157,7 @@
           <a:lstStyle/>
           <a:p>
             <a:r>
-              <a:rPr lang="en-US" altLang="zh-TW" smtClean="0"/>
+              <a:rPr lang="en-US" altLang="zh-TW"/>
               <a:t>Click to edit Master title style</a:t>
             </a:r>
             <a:endParaRPr lang="zh-TW" altLang="en-US"/>
@@ -1209,35 +1214,35 @@
           <a:p>
             <a:pPr lvl="0"/>
             <a:r>
-              <a:rPr lang="en-US" altLang="zh-TW" smtClean="0"/>
+              <a:rPr lang="en-US" altLang="zh-TW"/>
               <a:t>Edit Master text styles</a:t>
             </a:r>
           </a:p>
           <a:p>
             <a:pPr lvl="1"/>
             <a:r>
-              <a:rPr lang="en-US" altLang="zh-TW" smtClean="0"/>
+              <a:rPr lang="en-US" altLang="zh-TW"/>
               <a:t>Second level</a:t>
             </a:r>
           </a:p>
           <a:p>
             <a:pPr lvl="2"/>
             <a:r>
-              <a:rPr lang="en-US" altLang="zh-TW" smtClean="0"/>
+              <a:rPr lang="en-US" altLang="zh-TW"/>
               <a:t>Third level</a:t>
             </a:r>
           </a:p>
           <a:p>
             <a:pPr lvl="3"/>
             <a:r>
-              <a:rPr lang="en-US" altLang="zh-TW" smtClean="0"/>
+              <a:rPr lang="en-US" altLang="zh-TW"/>
               <a:t>Fourth level</a:t>
             </a:r>
           </a:p>
           <a:p>
             <a:pPr lvl="4"/>
             <a:r>
-              <a:rPr lang="en-US" altLang="zh-TW" smtClean="0"/>
+              <a:rPr lang="en-US" altLang="zh-TW"/>
               <a:t>Fifth level</a:t>
             </a:r>
             <a:endParaRPr lang="zh-TW" altLang="en-US"/>
@@ -1294,35 +1299,35 @@
           <a:p>
             <a:pPr lvl="0"/>
             <a:r>
-              <a:rPr lang="en-US" altLang="zh-TW" smtClean="0"/>
+              <a:rPr lang="en-US" altLang="zh-TW"/>
               <a:t>Edit Master text styles</a:t>
             </a:r>
           </a:p>
           <a:p>
             <a:pPr lvl="1"/>
             <a:r>
-              <a:rPr lang="en-US" altLang="zh-TW" smtClean="0"/>
+              <a:rPr lang="en-US" altLang="zh-TW"/>
               <a:t>Second level</a:t>
             </a:r>
           </a:p>
           <a:p>
             <a:pPr lvl="2"/>
             <a:r>
-              <a:rPr lang="en-US" altLang="zh-TW" smtClean="0"/>
+              <a:rPr lang="en-US" altLang="zh-TW"/>
               <a:t>Third level</a:t>
             </a:r>
           </a:p>
           <a:p>
             <a:pPr lvl="3"/>
             <a:r>
-              <a:rPr lang="en-US" altLang="zh-TW" smtClean="0"/>
+              <a:rPr lang="en-US" altLang="zh-TW"/>
               <a:t>Fourth level</a:t>
             </a:r>
           </a:p>
           <a:p>
             <a:pPr lvl="4"/>
             <a:r>
-              <a:rPr lang="en-US" altLang="zh-TW" smtClean="0"/>
+              <a:rPr lang="en-US" altLang="zh-TW"/>
               <a:t>Fifth level</a:t>
             </a:r>
             <a:endParaRPr lang="zh-TW" altLang="en-US"/>
@@ -1346,7 +1351,7 @@
           <a:p>
             <a:fld id="{E767E6BA-C17D-4DE3-A8A4-9877A2D746E7}" type="datetimeFigureOut">
               <a:rPr lang="vi-VN" smtClean="0"/>
-              <a:t>06/03/2021</a:t>
+              <a:t>28/09/2024</a:t>
             </a:fld>
             <a:endParaRPr lang="vi-VN"/>
           </a:p>
@@ -1444,7 +1449,7 @@
           </a:lstStyle>
           <a:p>
             <a:r>
-              <a:rPr lang="en-US" altLang="zh-TW" smtClean="0"/>
+              <a:rPr lang="en-US" altLang="zh-TW"/>
               <a:t>Click to edit Master title style</a:t>
             </a:r>
             <a:endParaRPr lang="zh-TW" altLang="en-US"/>
@@ -1510,7 +1515,7 @@
           <a:p>
             <a:pPr lvl="0"/>
             <a:r>
-              <a:rPr lang="en-US" altLang="zh-TW" smtClean="0"/>
+              <a:rPr lang="en-US" altLang="zh-TW"/>
               <a:t>Edit Master text styles</a:t>
             </a:r>
           </a:p>
@@ -1566,35 +1571,35 @@
           <a:p>
             <a:pPr lvl="0"/>
             <a:r>
-              <a:rPr lang="en-US" altLang="zh-TW" smtClean="0"/>
+              <a:rPr lang="en-US" altLang="zh-TW"/>
               <a:t>Edit Master text styles</a:t>
             </a:r>
           </a:p>
           <a:p>
             <a:pPr lvl="1"/>
             <a:r>
-              <a:rPr lang="en-US" altLang="zh-TW" smtClean="0"/>
+              <a:rPr lang="en-US" altLang="zh-TW"/>
               <a:t>Second level</a:t>
             </a:r>
           </a:p>
           <a:p>
             <a:pPr lvl="2"/>
             <a:r>
-              <a:rPr lang="en-US" altLang="zh-TW" smtClean="0"/>
+              <a:rPr lang="en-US" altLang="zh-TW"/>
               <a:t>Third level</a:t>
             </a:r>
           </a:p>
           <a:p>
             <a:pPr lvl="3"/>
             <a:r>
-              <a:rPr lang="en-US" altLang="zh-TW" smtClean="0"/>
+              <a:rPr lang="en-US" altLang="zh-TW"/>
               <a:t>Fourth level</a:t>
             </a:r>
           </a:p>
           <a:p>
             <a:pPr lvl="4"/>
             <a:r>
-              <a:rPr lang="en-US" altLang="zh-TW" smtClean="0"/>
+              <a:rPr lang="en-US" altLang="zh-TW"/>
               <a:t>Fifth level</a:t>
             </a:r>
             <a:endParaRPr lang="zh-TW" altLang="en-US"/>
@@ -1660,7 +1665,7 @@
           <a:p>
             <a:pPr lvl="0"/>
             <a:r>
-              <a:rPr lang="en-US" altLang="zh-TW" smtClean="0"/>
+              <a:rPr lang="en-US" altLang="zh-TW"/>
               <a:t>Edit Master text styles</a:t>
             </a:r>
           </a:p>
@@ -1716,35 +1721,35 @@
           <a:p>
             <a:pPr lvl="0"/>
             <a:r>
-              <a:rPr lang="en-US" altLang="zh-TW" smtClean="0"/>
+              <a:rPr lang="en-US" altLang="zh-TW"/>
               <a:t>Edit Master text styles</a:t>
             </a:r>
           </a:p>
           <a:p>
             <a:pPr lvl="1"/>
             <a:r>
-              <a:rPr lang="en-US" altLang="zh-TW" smtClean="0"/>
+              <a:rPr lang="en-US" altLang="zh-TW"/>
               <a:t>Second level</a:t>
             </a:r>
           </a:p>
           <a:p>
             <a:pPr lvl="2"/>
             <a:r>
-              <a:rPr lang="en-US" altLang="zh-TW" smtClean="0"/>
+              <a:rPr lang="en-US" altLang="zh-TW"/>
               <a:t>Third level</a:t>
             </a:r>
           </a:p>
           <a:p>
             <a:pPr lvl="3"/>
             <a:r>
-              <a:rPr lang="en-US" altLang="zh-TW" smtClean="0"/>
+              <a:rPr lang="en-US" altLang="zh-TW"/>
               <a:t>Fourth level</a:t>
             </a:r>
           </a:p>
           <a:p>
             <a:pPr lvl="4"/>
             <a:r>
-              <a:rPr lang="en-US" altLang="zh-TW" smtClean="0"/>
+              <a:rPr lang="en-US" altLang="zh-TW"/>
               <a:t>Fifth level</a:t>
             </a:r>
             <a:endParaRPr lang="zh-TW" altLang="en-US"/>
@@ -1768,7 +1773,7 @@
           <a:p>
             <a:fld id="{E767E6BA-C17D-4DE3-A8A4-9877A2D746E7}" type="datetimeFigureOut">
               <a:rPr lang="vi-VN" smtClean="0"/>
-              <a:t>06/03/2021</a:t>
+              <a:t>28/09/2024</a:t>
             </a:fld>
             <a:endParaRPr lang="vi-VN"/>
           </a:p>
@@ -1862,7 +1867,7 @@
           <a:lstStyle/>
           <a:p>
             <a:r>
-              <a:rPr lang="en-US" altLang="zh-TW" smtClean="0"/>
+              <a:rPr lang="en-US" altLang="zh-TW"/>
               <a:t>Click to edit Master title style</a:t>
             </a:r>
             <a:endParaRPr lang="zh-TW" altLang="en-US"/>
@@ -1886,7 +1891,7 @@
           <a:p>
             <a:fld id="{E767E6BA-C17D-4DE3-A8A4-9877A2D746E7}" type="datetimeFigureOut">
               <a:rPr lang="vi-VN" smtClean="0"/>
-              <a:t>06/03/2021</a:t>
+              <a:t>28/09/2024</a:t>
             </a:fld>
             <a:endParaRPr lang="vi-VN"/>
           </a:p>
@@ -1981,7 +1986,7 @@
           <a:p>
             <a:fld id="{E767E6BA-C17D-4DE3-A8A4-9877A2D746E7}" type="datetimeFigureOut">
               <a:rPr lang="vi-VN" smtClean="0"/>
-              <a:t>06/03/2021</a:t>
+              <a:t>28/09/2024</a:t>
             </a:fld>
             <a:endParaRPr lang="vi-VN"/>
           </a:p>
@@ -2084,7 +2089,7 @@
           </a:lstStyle>
           <a:p>
             <a:r>
-              <a:rPr lang="en-US" altLang="zh-TW" smtClean="0"/>
+              <a:rPr lang="en-US" altLang="zh-TW"/>
               <a:t>Click to edit Master title style</a:t>
             </a:r>
             <a:endParaRPr lang="zh-TW" altLang="en-US"/>
@@ -2141,35 +2146,35 @@
           <a:p>
             <a:pPr lvl="0"/>
             <a:r>
-              <a:rPr lang="en-US" altLang="zh-TW" smtClean="0"/>
+              <a:rPr lang="en-US" altLang="zh-TW"/>
               <a:t>Edit Master text styles</a:t>
             </a:r>
           </a:p>
           <a:p>
             <a:pPr lvl="1"/>
             <a:r>
-              <a:rPr lang="en-US" altLang="zh-TW" smtClean="0"/>
+              <a:rPr lang="en-US" altLang="zh-TW"/>
               <a:t>Second level</a:t>
             </a:r>
           </a:p>
           <a:p>
             <a:pPr lvl="2"/>
             <a:r>
-              <a:rPr lang="en-US" altLang="zh-TW" smtClean="0"/>
+              <a:rPr lang="en-US" altLang="zh-TW"/>
               <a:t>Third level</a:t>
             </a:r>
           </a:p>
           <a:p>
             <a:pPr lvl="3"/>
             <a:r>
-              <a:rPr lang="en-US" altLang="zh-TW" smtClean="0"/>
+              <a:rPr lang="en-US" altLang="zh-TW"/>
               <a:t>Fourth level</a:t>
             </a:r>
           </a:p>
           <a:p>
             <a:pPr lvl="4"/>
             <a:r>
-              <a:rPr lang="en-US" altLang="zh-TW" smtClean="0"/>
+              <a:rPr lang="en-US" altLang="zh-TW"/>
               <a:t>Fifth level</a:t>
             </a:r>
             <a:endParaRPr lang="zh-TW" altLang="en-US"/>
@@ -2235,7 +2240,7 @@
           <a:p>
             <a:pPr lvl="0"/>
             <a:r>
-              <a:rPr lang="en-US" altLang="zh-TW" smtClean="0"/>
+              <a:rPr lang="en-US" altLang="zh-TW"/>
               <a:t>Edit Master text styles</a:t>
             </a:r>
           </a:p>
@@ -2258,7 +2263,7 @@
           <a:p>
             <a:fld id="{E767E6BA-C17D-4DE3-A8A4-9877A2D746E7}" type="datetimeFigureOut">
               <a:rPr lang="vi-VN" smtClean="0"/>
-              <a:t>06/03/2021</a:t>
+              <a:t>28/09/2024</a:t>
             </a:fld>
             <a:endParaRPr lang="vi-VN"/>
           </a:p>
@@ -2361,7 +2366,7 @@
           </a:lstStyle>
           <a:p>
             <a:r>
-              <a:rPr lang="en-US" altLang="zh-TW" smtClean="0"/>
+              <a:rPr lang="en-US" altLang="zh-TW"/>
               <a:t>Click to edit Master title style</a:t>
             </a:r>
             <a:endParaRPr lang="zh-TW" altLang="en-US"/>
@@ -2426,7 +2431,7 @@
           </a:lstStyle>
           <a:p>
             <a:r>
-              <a:rPr lang="en-US" altLang="zh-TW" smtClean="0"/>
+              <a:rPr lang="en-US" altLang="zh-TW"/>
               <a:t>Click icon to add picture</a:t>
             </a:r>
             <a:endParaRPr lang="zh-TW" altLang="en-US"/>
@@ -2492,7 +2497,7 @@
           <a:p>
             <a:pPr lvl="0"/>
             <a:r>
-              <a:rPr lang="en-US" altLang="zh-TW" smtClean="0"/>
+              <a:rPr lang="en-US" altLang="zh-TW"/>
               <a:t>Edit Master text styles</a:t>
             </a:r>
           </a:p>
@@ -2515,7 +2520,7 @@
           <a:p>
             <a:fld id="{E767E6BA-C17D-4DE3-A8A4-9877A2D746E7}" type="datetimeFigureOut">
               <a:rPr lang="vi-VN" smtClean="0"/>
-              <a:t>06/03/2021</a:t>
+              <a:t>28/09/2024</a:t>
             </a:fld>
             <a:endParaRPr lang="vi-VN"/>
           </a:p>
@@ -2629,10 +2634,9 @@
           <a:lstStyle/>
           <a:p>
             <a:r>
-              <a:rPr lang="zh-TW" altLang="en-US" smtClean="0"/>
+              <a:rPr lang="zh-TW" altLang="en-US"/>
               <a:t>按一下以編輯母片標題樣式</a:t>
             </a:r>
-            <a:endParaRPr lang="zh-TW" altLang="en-US"/>
           </a:p>
         </p:txBody>
       </p:sp>
@@ -2663,38 +2667,37 @@
           <a:p>
             <a:pPr lvl="0"/>
             <a:r>
-              <a:rPr lang="zh-TW" altLang="en-US" smtClean="0"/>
+              <a:rPr lang="zh-TW" altLang="en-US"/>
               <a:t>按一下以編輯母片文字樣式</a:t>
             </a:r>
           </a:p>
           <a:p>
             <a:pPr lvl="1"/>
             <a:r>
-              <a:rPr lang="zh-TW" altLang="en-US" smtClean="0"/>
+              <a:rPr lang="zh-TW" altLang="en-US"/>
               <a:t>第二層</a:t>
             </a:r>
           </a:p>
           <a:p>
             <a:pPr lvl="2"/>
             <a:r>
-              <a:rPr lang="zh-TW" altLang="en-US" smtClean="0"/>
+              <a:rPr lang="zh-TW" altLang="en-US"/>
               <a:t>第三層</a:t>
             </a:r>
           </a:p>
           <a:p>
             <a:pPr lvl="3"/>
             <a:r>
-              <a:rPr lang="zh-TW" altLang="en-US" smtClean="0"/>
+              <a:rPr lang="zh-TW" altLang="en-US"/>
               <a:t>第四層</a:t>
             </a:r>
           </a:p>
           <a:p>
             <a:pPr lvl="4"/>
             <a:r>
-              <a:rPr lang="zh-TW" altLang="en-US" smtClean="0"/>
+              <a:rPr lang="zh-TW" altLang="en-US"/>
               <a:t>第五層</a:t>
             </a:r>
-            <a:endParaRPr lang="zh-TW" altLang="en-US"/>
           </a:p>
         </p:txBody>
       </p:sp>
@@ -2733,7 +2736,7 @@
           <a:p>
             <a:fld id="{E767E6BA-C17D-4DE3-A8A4-9877A2D746E7}" type="datetimeFigureOut">
               <a:rPr lang="vi-VN" smtClean="0"/>
-              <a:t>06/03/2021</a:t>
+              <a:t>28/09/2024</a:t>
             </a:fld>
             <a:endParaRPr lang="vi-VN"/>
           </a:p>
@@ -3120,7 +3123,7 @@
         </p:nvSpPr>
         <p:spPr>
           <a:xfrm>
-            <a:off x="0" y="2857513"/>
+            <a:off x="0" y="2594276"/>
             <a:ext cx="12192000" cy="1143000"/>
           </a:xfrm>
         </p:spPr>
@@ -3145,41 +3148,7 @@
                 <a:latin typeface="微軟正黑體" pitchFamily="34" charset="-120"/>
                 <a:ea typeface="微軟正黑體" pitchFamily="34" charset="-120"/>
               </a:rPr>
-              <a:t>榮</a:t>
-            </a:r>
-            <a:r>
-              <a:rPr lang="zh-CN" altLang="en-US" sz="7200" b="1" i="1" dirty="0">
-                <a:solidFill>
-                  <a:srgbClr val="000066"/>
-                </a:solidFill>
-                <a:effectLst>
-                  <a:outerShdw blurRad="38100" dist="38100" dir="2700000" algn="tl">
-                    <a:srgbClr val="000000">
-                      <a:alpha val="43137"/>
-                    </a:srgbClr>
-                  </a:outerShdw>
-                </a:effectLst>
-                <a:latin typeface="微軟正黑體" pitchFamily="34" charset="-120"/>
-                <a:ea typeface="微軟正黑體" pitchFamily="34" charset="-120"/>
-              </a:rPr>
-              <a:t>耀都</a:t>
-            </a:r>
-            <a:r>
-              <a:rPr lang="zh-CN" altLang="en-US" sz="7200" b="1" i="1" dirty="0">
-                <a:solidFill>
-                  <a:srgbClr val="000066"/>
-                </a:solidFill>
-                <a:effectLst>
-                  <a:outerShdw blurRad="38100" dist="38100" dir="2700000" algn="tl">
-                    <a:srgbClr val="000000">
-                      <a:alpha val="43137"/>
-                    </a:srgbClr>
-                  </a:outerShdw>
-                </a:effectLst>
-                <a:latin typeface="微軟正黑體" pitchFamily="34" charset="-120"/>
-                <a:ea typeface="微軟正黑體" pitchFamily="34" charset="-120"/>
-              </a:rPr>
-              <a:t>歸袮</a:t>
+              <a:t>榮耀都歸祢</a:t>
             </a:r>
             <a:endParaRPr lang="zh-TW" altLang="en-US" sz="7200" b="1" i="1" dirty="0">
               <a:solidFill>
@@ -3261,17 +3230,7 @@
                 <a:latin typeface="微軟正黑體" pitchFamily="34" charset="-120"/>
                 <a:ea typeface="微軟正黑體" pitchFamily="34" charset="-120"/>
               </a:rPr>
-              <a:t>哈利路</a:t>
-            </a:r>
-            <a:r>
-              <a:rPr lang="zh-TW" altLang="en-US" sz="6400" b="1" dirty="0">
-                <a:solidFill>
-                  <a:srgbClr val="000066"/>
-                </a:solidFill>
-                <a:latin typeface="微軟正黑體" pitchFamily="34" charset="-120"/>
-                <a:ea typeface="微軟正黑體" pitchFamily="34" charset="-120"/>
-              </a:rPr>
-              <a:t>亞</a:t>
+              <a:t>哈利路亞</a:t>
             </a:r>
             <a:endParaRPr lang="en-US" altLang="zh-TW" sz="6400" b="1" dirty="0">
               <a:solidFill>
@@ -3293,17 +3252,7 @@
                 <a:latin typeface="微軟正黑體" pitchFamily="34" charset="-120"/>
                 <a:ea typeface="微軟正黑體" pitchFamily="34" charset="-120"/>
               </a:rPr>
-              <a:t>榮</a:t>
-            </a:r>
-            <a:r>
-              <a:rPr lang="zh-TW" altLang="en-US" sz="6400" b="1" dirty="0">
-                <a:solidFill>
-                  <a:srgbClr val="000066"/>
-                </a:solidFill>
-                <a:latin typeface="微軟正黑體" pitchFamily="34" charset="-120"/>
-                <a:ea typeface="微軟正黑體" pitchFamily="34" charset="-120"/>
-              </a:rPr>
-              <a:t>耀歸寶座羔羊</a:t>
+              <a:t>榮耀歸寶座羔羊</a:t>
             </a:r>
             <a:endParaRPr lang="en-US" altLang="zh-TW" sz="6400" b="1" dirty="0">
               <a:solidFill>
@@ -3311,6 +3260,74 @@
               </a:solidFill>
               <a:latin typeface="微軟正黑體" pitchFamily="34" charset="-120"/>
               <a:ea typeface="微軟正黑體" pitchFamily="34" charset="-120"/>
+            </a:endParaRPr>
+          </a:p>
+        </p:txBody>
+      </p:sp>
+      <p:sp>
+        <p:nvSpPr>
+          <p:cNvPr id="2" name="TextBox 1">
+            <a:extLst>
+              <a:ext uri="{FF2B5EF4-FFF2-40B4-BE49-F238E27FC236}">
+                <a16:creationId xmlns:a16="http://schemas.microsoft.com/office/drawing/2014/main" id="{C4154506-5132-16CC-74E3-70ECA7E7A0F7}"/>
+              </a:ext>
+            </a:extLst>
+          </p:cNvPr>
+          <p:cNvSpPr txBox="1"/>
+          <p:nvPr/>
+        </p:nvSpPr>
+        <p:spPr>
+          <a:xfrm>
+            <a:off x="0" y="5253348"/>
+            <a:ext cx="12192000" cy="646331"/>
+          </a:xfrm>
+          <a:prstGeom prst="rect">
+            <a:avLst/>
+          </a:prstGeom>
+          <a:noFill/>
+        </p:spPr>
+        <p:txBody>
+          <a:bodyPr wrap="square" rtlCol="0">
+            <a:spAutoFit/>
+          </a:bodyPr>
+          <a:lstStyle/>
+          <a:p>
+            <a:pPr algn="ctr"/>
+            <a:r>
+              <a:rPr lang="en-US" sz="3600" b="1" dirty="0">
+                <a:solidFill>
+                  <a:srgbClr val="000066"/>
+                </a:solidFill>
+                <a:latin typeface="Microsoft JhengHei" panose="020B0604030504040204" pitchFamily="34" charset="-120"/>
+                <a:ea typeface="Microsoft JhengHei" panose="020B0604030504040204" pitchFamily="34" charset="-120"/>
+              </a:rPr>
+              <a:t>( </a:t>
+            </a:r>
+            <a:r>
+              <a:rPr lang="zh-CN" altLang="en-US" sz="3600" b="1" dirty="0">
+                <a:solidFill>
+                  <a:srgbClr val="000066"/>
+                </a:solidFill>
+                <a:latin typeface="Microsoft JhengHei" panose="020B0604030504040204" pitchFamily="34" charset="-120"/>
+                <a:ea typeface="Microsoft JhengHei" panose="020B0604030504040204" pitchFamily="34" charset="-120"/>
+              </a:rPr>
+              <a:t>正歌</a:t>
+            </a:r>
+            <a:r>
+              <a:rPr lang="en-US" sz="3600" b="1" dirty="0">
+                <a:solidFill>
+                  <a:srgbClr val="000066"/>
+                </a:solidFill>
+                <a:latin typeface="Microsoft JhengHei" panose="020B0604030504040204" pitchFamily="34" charset="-120"/>
+                <a:ea typeface="Microsoft JhengHei" panose="020B0604030504040204" pitchFamily="34" charset="-120"/>
+              </a:rPr>
+              <a:t> )</a:t>
+            </a:r>
+            <a:endParaRPr lang="vi-VN" sz="3600" b="1" dirty="0">
+              <a:solidFill>
+                <a:srgbClr val="000066"/>
+              </a:solidFill>
+              <a:ea typeface="Microsoft JhengHei" panose="020B0604030504040204" pitchFamily="34" charset="-120"/>
             </a:endParaRPr>
           </a:p>
         </p:txBody>
@@ -3378,47 +3395,17 @@
                 <a:latin typeface="微軟正黑體" pitchFamily="34" charset="-120"/>
                 <a:ea typeface="微軟正黑體" pitchFamily="34" charset="-120"/>
               </a:rPr>
-              <a:t>哈利路</a:t>
-            </a:r>
-            <a:r>
-              <a:rPr lang="zh-TW" altLang="en-US" sz="6400" b="1" dirty="0">
+              <a:t>哈利路亞  榮耀都歸</a:t>
+            </a:r>
+            <a:r>
+              <a:rPr lang="zh-CN" altLang="en-US" sz="6400" b="1" dirty="0">
                 <a:solidFill>
                   <a:srgbClr val="000066"/>
                 </a:solidFill>
                 <a:latin typeface="微軟正黑體" pitchFamily="34" charset="-120"/>
                 <a:ea typeface="微軟正黑體" pitchFamily="34" charset="-120"/>
               </a:rPr>
-              <a:t>亞  榮</a:t>
-            </a:r>
-            <a:r>
-              <a:rPr lang="zh-TW" altLang="en-US" sz="6400" b="1" dirty="0">
-                <a:solidFill>
-                  <a:srgbClr val="000066"/>
-                </a:solidFill>
-                <a:latin typeface="微軟正黑體" pitchFamily="34" charset="-120"/>
-                <a:ea typeface="微軟正黑體" pitchFamily="34" charset="-120"/>
-              </a:rPr>
-              <a:t>耀都</a:t>
-            </a:r>
-            <a:r>
-              <a:rPr lang="zh-TW" altLang="en-US" sz="6400" b="1" dirty="0">
-                <a:solidFill>
-                  <a:srgbClr val="000066"/>
-                </a:solidFill>
-                <a:latin typeface="微軟正黑體" pitchFamily="34" charset="-120"/>
-                <a:ea typeface="微軟正黑體" pitchFamily="34" charset="-120"/>
-              </a:rPr>
-              <a:t>歸</a:t>
-            </a:r>
-            <a:r>
-              <a:rPr lang="zh-CN" altLang="en-US" sz="6400" b="1" dirty="0">
-                <a:solidFill>
-                  <a:srgbClr val="000066"/>
-                </a:solidFill>
-                <a:latin typeface="微軟正黑體" pitchFamily="34" charset="-120"/>
-                <a:ea typeface="微軟正黑體" pitchFamily="34" charset="-120"/>
-              </a:rPr>
-              <a:t>袮</a:t>
+              <a:t>祢</a:t>
             </a:r>
             <a:endParaRPr lang="en-US" altLang="zh-TW" sz="6400" b="1" dirty="0">
               <a:solidFill>
@@ -3440,17 +3427,17 @@
                 <a:latin typeface="微軟正黑體" pitchFamily="34" charset="-120"/>
                 <a:ea typeface="微軟正黑體" pitchFamily="34" charset="-120"/>
               </a:rPr>
-              <a:t>榮</a:t>
-            </a:r>
-            <a:r>
-              <a:rPr lang="zh-TW" altLang="en-US" sz="6400" b="1" dirty="0">
+              <a:t>榮耀都歸</a:t>
+            </a:r>
+            <a:r>
+              <a:rPr lang="zh-CN" altLang="en-US" sz="6400" b="1" dirty="0">
                 <a:solidFill>
                   <a:srgbClr val="000066"/>
                 </a:solidFill>
                 <a:latin typeface="微軟正黑體" pitchFamily="34" charset="-120"/>
                 <a:ea typeface="微軟正黑體" pitchFamily="34" charset="-120"/>
               </a:rPr>
-              <a:t>耀都</a:t>
+              <a:t>祢</a:t>
             </a:r>
             <a:r>
               <a:rPr lang="zh-TW" altLang="en-US" sz="6400" b="1" dirty="0">
@@ -3460,37 +3447,7 @@
                 <a:latin typeface="微軟正黑體" pitchFamily="34" charset="-120"/>
                 <a:ea typeface="微軟正黑體" pitchFamily="34" charset="-120"/>
               </a:rPr>
-              <a:t>歸</a:t>
-            </a:r>
-            <a:r>
-              <a:rPr lang="zh-CN" altLang="en-US" sz="6400" b="1" dirty="0">
-                <a:solidFill>
-                  <a:srgbClr val="000066"/>
-                </a:solidFill>
-                <a:latin typeface="微軟正黑體" pitchFamily="34" charset="-120"/>
-                <a:ea typeface="微軟正黑體" pitchFamily="34" charset="-120"/>
-              </a:rPr>
-              <a:t>袮</a:t>
-            </a:r>
-            <a:r>
-              <a:rPr lang="zh-TW" altLang="en-US" sz="6400" b="1" dirty="0">
-                <a:solidFill>
-                  <a:srgbClr val="000066"/>
-                </a:solidFill>
-                <a:latin typeface="微軟正黑體" pitchFamily="34" charset="-120"/>
-                <a:ea typeface="微軟正黑體" pitchFamily="34" charset="-120"/>
-              </a:rPr>
-              <a:t>真</a:t>
-            </a:r>
-            <a:r>
-              <a:rPr lang="zh-TW" altLang="en-US" sz="6400" b="1" dirty="0">
-                <a:solidFill>
-                  <a:srgbClr val="000066"/>
-                </a:solidFill>
-                <a:latin typeface="微軟正黑體" pitchFamily="34" charset="-120"/>
-                <a:ea typeface="微軟正黑體" pitchFamily="34" charset="-120"/>
-              </a:rPr>
-              <a:t>神</a:t>
+              <a:t>真神</a:t>
             </a:r>
             <a:endParaRPr lang="en-US" altLang="zh-TW" sz="6400" b="1" dirty="0">
               <a:solidFill>
@@ -3498,6 +3455,74 @@
               </a:solidFill>
               <a:latin typeface="微軟正黑體" pitchFamily="34" charset="-120"/>
               <a:ea typeface="微軟正黑體" pitchFamily="34" charset="-120"/>
+            </a:endParaRPr>
+          </a:p>
+        </p:txBody>
+      </p:sp>
+      <p:sp>
+        <p:nvSpPr>
+          <p:cNvPr id="2" name="TextBox 1">
+            <a:extLst>
+              <a:ext uri="{FF2B5EF4-FFF2-40B4-BE49-F238E27FC236}">
+                <a16:creationId xmlns:a16="http://schemas.microsoft.com/office/drawing/2014/main" id="{47C9158A-9098-53AD-905E-2C576DA7A861}"/>
+              </a:ext>
+            </a:extLst>
+          </p:cNvPr>
+          <p:cNvSpPr txBox="1"/>
+          <p:nvPr/>
+        </p:nvSpPr>
+        <p:spPr>
+          <a:xfrm>
+            <a:off x="0" y="5253348"/>
+            <a:ext cx="12192000" cy="646331"/>
+          </a:xfrm>
+          <a:prstGeom prst="rect">
+            <a:avLst/>
+          </a:prstGeom>
+          <a:noFill/>
+        </p:spPr>
+        <p:txBody>
+          <a:bodyPr wrap="square" rtlCol="0">
+            <a:spAutoFit/>
+          </a:bodyPr>
+          <a:lstStyle/>
+          <a:p>
+            <a:pPr algn="ctr"/>
+            <a:r>
+              <a:rPr lang="en-US" sz="3600" b="1" dirty="0">
+                <a:solidFill>
+                  <a:srgbClr val="000066"/>
+                </a:solidFill>
+                <a:latin typeface="Microsoft JhengHei" panose="020B0604030504040204" pitchFamily="34" charset="-120"/>
+                <a:ea typeface="Microsoft JhengHei" panose="020B0604030504040204" pitchFamily="34" charset="-120"/>
+              </a:rPr>
+              <a:t>( </a:t>
+            </a:r>
+            <a:r>
+              <a:rPr lang="zh-CN" altLang="en-US" sz="3600" b="1" dirty="0">
+                <a:solidFill>
+                  <a:srgbClr val="000066"/>
+                </a:solidFill>
+                <a:latin typeface="Microsoft JhengHei" panose="020B0604030504040204" pitchFamily="34" charset="-120"/>
+                <a:ea typeface="Microsoft JhengHei" panose="020B0604030504040204" pitchFamily="34" charset="-120"/>
+              </a:rPr>
+              <a:t>正歌</a:t>
+            </a:r>
+            <a:r>
+              <a:rPr lang="en-US" sz="3600" b="1" dirty="0">
+                <a:solidFill>
+                  <a:srgbClr val="000066"/>
+                </a:solidFill>
+                <a:latin typeface="Microsoft JhengHei" panose="020B0604030504040204" pitchFamily="34" charset="-120"/>
+                <a:ea typeface="Microsoft JhengHei" panose="020B0604030504040204" pitchFamily="34" charset="-120"/>
+              </a:rPr>
+              <a:t> )</a:t>
+            </a:r>
+            <a:endParaRPr lang="vi-VN" sz="3600" b="1" dirty="0">
+              <a:solidFill>
+                <a:srgbClr val="000066"/>
+              </a:solidFill>
+              <a:ea typeface="Microsoft JhengHei" panose="020B0604030504040204" pitchFamily="34" charset="-120"/>
             </a:endParaRPr>
           </a:p>
         </p:txBody>
@@ -3565,27 +3590,17 @@
                 <a:latin typeface="微軟正黑體" pitchFamily="34" charset="-120"/>
                 <a:ea typeface="微軟正黑體" pitchFamily="34" charset="-120"/>
               </a:rPr>
-              <a:t>我一生都要來敬</a:t>
-            </a:r>
-            <a:r>
-              <a:rPr lang="zh-TW" altLang="en-US" sz="6400" b="1" dirty="0">
+              <a:t>我一生都要來敬拜</a:t>
+            </a:r>
+            <a:r>
+              <a:rPr lang="zh-CN" altLang="en-US" sz="6400" b="1" dirty="0">
                 <a:solidFill>
                   <a:srgbClr val="000066"/>
                 </a:solidFill>
                 <a:latin typeface="微軟正黑體" pitchFamily="34" charset="-120"/>
                 <a:ea typeface="微軟正黑體" pitchFamily="34" charset="-120"/>
               </a:rPr>
-              <a:t>拜</a:t>
-            </a:r>
-            <a:r>
-              <a:rPr lang="zh-CN" altLang="en-US" sz="6400" b="1" dirty="0">
-                <a:solidFill>
-                  <a:srgbClr val="000066"/>
-                </a:solidFill>
-                <a:latin typeface="微軟正黑體" pitchFamily="34" charset="-120"/>
-                <a:ea typeface="微軟正黑體" pitchFamily="34" charset="-120"/>
-              </a:rPr>
-              <a:t>袮</a:t>
+              <a:t>祢</a:t>
             </a:r>
             <a:endParaRPr lang="en-US" altLang="zh-TW" sz="6400" b="1" dirty="0">
               <a:solidFill>
@@ -3607,17 +3622,7 @@
                 <a:latin typeface="微軟正黑體" pitchFamily="34" charset="-120"/>
                 <a:ea typeface="微軟正黑體" pitchFamily="34" charset="-120"/>
               </a:rPr>
-              <a:t>哈</a:t>
-            </a:r>
-            <a:r>
-              <a:rPr lang="zh-TW" altLang="en-US" sz="6400" b="1" dirty="0">
-                <a:solidFill>
-                  <a:srgbClr val="000066"/>
-                </a:solidFill>
-                <a:latin typeface="微軟正黑體" pitchFamily="34" charset="-120"/>
-                <a:ea typeface="微軟正黑體" pitchFamily="34" charset="-120"/>
-              </a:rPr>
-              <a:t>利路亞</a:t>
+              <a:t>哈利路亞</a:t>
             </a:r>
             <a:endParaRPr lang="en-US" altLang="zh-TW" sz="6400" b="1" dirty="0">
               <a:solidFill>
@@ -3625,6 +3630,74 @@
               </a:solidFill>
               <a:latin typeface="微軟正黑體" pitchFamily="34" charset="-120"/>
               <a:ea typeface="微軟正黑體" pitchFamily="34" charset="-120"/>
+            </a:endParaRPr>
+          </a:p>
+        </p:txBody>
+      </p:sp>
+      <p:sp>
+        <p:nvSpPr>
+          <p:cNvPr id="2" name="TextBox 1">
+            <a:extLst>
+              <a:ext uri="{FF2B5EF4-FFF2-40B4-BE49-F238E27FC236}">
+                <a16:creationId xmlns:a16="http://schemas.microsoft.com/office/drawing/2014/main" id="{3614F3EA-F54C-AFAD-2BAE-E067318D5BF7}"/>
+              </a:ext>
+            </a:extLst>
+          </p:cNvPr>
+          <p:cNvSpPr txBox="1"/>
+          <p:nvPr/>
+        </p:nvSpPr>
+        <p:spPr>
+          <a:xfrm>
+            <a:off x="0" y="5253348"/>
+            <a:ext cx="12192000" cy="646331"/>
+          </a:xfrm>
+          <a:prstGeom prst="rect">
+            <a:avLst/>
+          </a:prstGeom>
+          <a:noFill/>
+        </p:spPr>
+        <p:txBody>
+          <a:bodyPr wrap="square" rtlCol="0">
+            <a:spAutoFit/>
+          </a:bodyPr>
+          <a:lstStyle/>
+          <a:p>
+            <a:pPr algn="ctr"/>
+            <a:r>
+              <a:rPr lang="en-US" sz="3600" b="1" dirty="0">
+                <a:solidFill>
+                  <a:srgbClr val="000066"/>
+                </a:solidFill>
+                <a:latin typeface="Microsoft JhengHei" panose="020B0604030504040204" pitchFamily="34" charset="-120"/>
+                <a:ea typeface="Microsoft JhengHei" panose="020B0604030504040204" pitchFamily="34" charset="-120"/>
+              </a:rPr>
+              <a:t>( </a:t>
+            </a:r>
+            <a:r>
+              <a:rPr lang="zh-CN" altLang="en-US" sz="3600" b="1" dirty="0">
+                <a:solidFill>
+                  <a:srgbClr val="000066"/>
+                </a:solidFill>
+                <a:latin typeface="Microsoft JhengHei" panose="020B0604030504040204" pitchFamily="34" charset="-120"/>
+                <a:ea typeface="Microsoft JhengHei" panose="020B0604030504040204" pitchFamily="34" charset="-120"/>
+              </a:rPr>
+              <a:t>副歌</a:t>
+            </a:r>
+            <a:r>
+              <a:rPr lang="en-US" sz="3600" b="1" dirty="0">
+                <a:solidFill>
+                  <a:srgbClr val="000066"/>
+                </a:solidFill>
+                <a:latin typeface="Microsoft JhengHei" panose="020B0604030504040204" pitchFamily="34" charset="-120"/>
+                <a:ea typeface="Microsoft JhengHei" panose="020B0604030504040204" pitchFamily="34" charset="-120"/>
+              </a:rPr>
+              <a:t> )</a:t>
+            </a:r>
+            <a:endParaRPr lang="vi-VN" sz="3600" b="1" dirty="0">
+              <a:solidFill>
+                <a:srgbClr val="000066"/>
+              </a:solidFill>
+              <a:ea typeface="Microsoft JhengHei" panose="020B0604030504040204" pitchFamily="34" charset="-120"/>
             </a:endParaRPr>
           </a:p>
         </p:txBody>
@@ -3692,17 +3765,7 @@
                 <a:latin typeface="微軟正黑體" pitchFamily="34" charset="-120"/>
                 <a:ea typeface="微軟正黑體" pitchFamily="34" charset="-120"/>
               </a:rPr>
-              <a:t>我的手我的</a:t>
-            </a:r>
-            <a:r>
-              <a:rPr lang="zh-CN" altLang="en-US" sz="6400" b="1" dirty="0">
-                <a:solidFill>
-                  <a:srgbClr val="000066"/>
-                </a:solidFill>
-                <a:latin typeface="微軟正黑體" pitchFamily="34" charset="-120"/>
-                <a:ea typeface="微軟正黑體" pitchFamily="34" charset="-120"/>
-              </a:rPr>
-              <a:t>口</a:t>
+              <a:t>我的手我的口</a:t>
             </a:r>
             <a:endParaRPr lang="en-US" altLang="zh-CN" sz="6400" b="1" dirty="0">
               <a:solidFill>
@@ -3724,27 +3787,7 @@
                 <a:latin typeface="微軟正黑體" pitchFamily="34" charset="-120"/>
                 <a:ea typeface="微軟正黑體" pitchFamily="34" charset="-120"/>
               </a:rPr>
-              <a:t>我</a:t>
-            </a:r>
-            <a:r>
-              <a:rPr lang="zh-CN" altLang="en-US" sz="6400" b="1" dirty="0">
-                <a:solidFill>
-                  <a:srgbClr val="000066"/>
-                </a:solidFill>
-                <a:latin typeface="微軟正黑體" pitchFamily="34" charset="-120"/>
-                <a:ea typeface="微軟正黑體" pitchFamily="34" charset="-120"/>
-              </a:rPr>
-              <a:t>全心我全</a:t>
-            </a:r>
-            <a:r>
-              <a:rPr lang="zh-CN" altLang="en-US" sz="6400" b="1" dirty="0">
-                <a:solidFill>
-                  <a:srgbClr val="000066"/>
-                </a:solidFill>
-                <a:latin typeface="微軟正黑體" pitchFamily="34" charset="-120"/>
-                <a:ea typeface="微軟正黑體" pitchFamily="34" charset="-120"/>
-              </a:rPr>
-              <a:t>人</a:t>
+              <a:t>我全心我全人</a:t>
             </a:r>
             <a:r>
               <a:rPr lang="en-US" altLang="zh-CN" sz="6400" b="1" dirty="0">
@@ -3764,27 +3807,7 @@
                 <a:latin typeface="微軟正黑體" pitchFamily="34" charset="-120"/>
                 <a:ea typeface="微軟正黑體" pitchFamily="34" charset="-120"/>
               </a:rPr>
-              <a:t>都</a:t>
-            </a:r>
-            <a:r>
-              <a:rPr lang="zh-CN" altLang="en-US" sz="6400" b="1" dirty="0">
-                <a:solidFill>
-                  <a:srgbClr val="000066"/>
-                </a:solidFill>
-                <a:latin typeface="微軟正黑體" pitchFamily="34" charset="-120"/>
-                <a:ea typeface="微軟正黑體" pitchFamily="34" charset="-120"/>
-              </a:rPr>
-              <a:t>要敬</a:t>
-            </a:r>
-            <a:r>
-              <a:rPr lang="zh-CN" altLang="en-US" sz="6400" b="1" dirty="0">
-                <a:solidFill>
-                  <a:srgbClr val="000066"/>
-                </a:solidFill>
-                <a:latin typeface="微軟正黑體" pitchFamily="34" charset="-120"/>
-                <a:ea typeface="微軟正黑體" pitchFamily="34" charset="-120"/>
-              </a:rPr>
-              <a:t>拜袮</a:t>
+              <a:t>都要敬拜祢</a:t>
             </a:r>
             <a:endParaRPr lang="en-US" altLang="zh-TW" sz="6400" b="1" dirty="0">
               <a:solidFill>
@@ -3792,6 +3815,74 @@
               </a:solidFill>
               <a:latin typeface="微軟正黑體" pitchFamily="34" charset="-120"/>
               <a:ea typeface="微軟正黑體" pitchFamily="34" charset="-120"/>
+            </a:endParaRPr>
+          </a:p>
+        </p:txBody>
+      </p:sp>
+      <p:sp>
+        <p:nvSpPr>
+          <p:cNvPr id="2" name="TextBox 1">
+            <a:extLst>
+              <a:ext uri="{FF2B5EF4-FFF2-40B4-BE49-F238E27FC236}">
+                <a16:creationId xmlns:a16="http://schemas.microsoft.com/office/drawing/2014/main" id="{501BD3D5-109F-FE86-EDFC-DE65A528BB4F}"/>
+              </a:ext>
+            </a:extLst>
+          </p:cNvPr>
+          <p:cNvSpPr txBox="1"/>
+          <p:nvPr/>
+        </p:nvSpPr>
+        <p:spPr>
+          <a:xfrm>
+            <a:off x="0" y="5253348"/>
+            <a:ext cx="12192000" cy="646331"/>
+          </a:xfrm>
+          <a:prstGeom prst="rect">
+            <a:avLst/>
+          </a:prstGeom>
+          <a:noFill/>
+        </p:spPr>
+        <p:txBody>
+          <a:bodyPr wrap="square" rtlCol="0">
+            <a:spAutoFit/>
+          </a:bodyPr>
+          <a:lstStyle/>
+          <a:p>
+            <a:pPr algn="ctr"/>
+            <a:r>
+              <a:rPr lang="en-US" sz="3600" b="1" dirty="0">
+                <a:solidFill>
+                  <a:srgbClr val="000066"/>
+                </a:solidFill>
+                <a:latin typeface="Microsoft JhengHei" panose="020B0604030504040204" pitchFamily="34" charset="-120"/>
+                <a:ea typeface="Microsoft JhengHei" panose="020B0604030504040204" pitchFamily="34" charset="-120"/>
+              </a:rPr>
+              <a:t>( </a:t>
+            </a:r>
+            <a:r>
+              <a:rPr lang="zh-CN" altLang="en-US" sz="3600" b="1" dirty="0">
+                <a:solidFill>
+                  <a:srgbClr val="000066"/>
+                </a:solidFill>
+                <a:latin typeface="Microsoft JhengHei" panose="020B0604030504040204" pitchFamily="34" charset="-120"/>
+                <a:ea typeface="Microsoft JhengHei" panose="020B0604030504040204" pitchFamily="34" charset="-120"/>
+              </a:rPr>
+              <a:t>副歌</a:t>
+            </a:r>
+            <a:r>
+              <a:rPr lang="en-US" sz="3600" b="1" dirty="0">
+                <a:solidFill>
+                  <a:srgbClr val="000066"/>
+                </a:solidFill>
+                <a:latin typeface="Microsoft JhengHei" panose="020B0604030504040204" pitchFamily="34" charset="-120"/>
+                <a:ea typeface="Microsoft JhengHei" panose="020B0604030504040204" pitchFamily="34" charset="-120"/>
+              </a:rPr>
+              <a:t> )</a:t>
+            </a:r>
+            <a:endParaRPr lang="vi-VN" sz="3600" b="1" dirty="0">
+              <a:solidFill>
+                <a:srgbClr val="000066"/>
+              </a:solidFill>
+              <a:ea typeface="Microsoft JhengHei" panose="020B0604030504040204" pitchFamily="34" charset="-120"/>
             </a:endParaRPr>
           </a:p>
         </p:txBody>
